--- a/reports/SupplyAI-RL_Mid_Project_Review.pptx
+++ b/reports/SupplyAI-RL_Mid_Project_Review.pptx
@@ -6013,7 +6013,7 @@
             </a:pPr>
             <a:r>
               <a:rPr lang="en-IN" sz="1400" b="0" dirty="0"/>
-              <a:t>All five classical policies were tuned by grid search on 12 separate seeds, then scored on 30 held-out seeds. Profit is per 180-day episode, in GBP.</a:t>
+              <a:t>All five classical policies were tuned by grid search on 12 separate seeds, then scored on 30 held-out seeds. Profit is per 180-day run, in rupees (1 GBP = ₹105; the data is from a UK shop).</a:t>
             </a:r>
           </a:p>
         </p:txBody>
@@ -6086,7 +6086,7 @@
                             <a:srgbClr val="FFFFFF"/>
                           </a:solidFill>
                         </a:rPr>
-                        <a:t>Policy</a:t>
+                        <a:t>Method</a:t>
                       </a:r>
                     </a:p>
                   </a:txBody>
@@ -6130,7 +6130,7 @@
                             <a:srgbClr val="FFFFFF"/>
                           </a:solidFill>
                         </a:rPr>
-                        <a:t>Std dev</a:t>
+                        <a:t>Spread</a:t>
                       </a:r>
                     </a:p>
                   </a:txBody>
@@ -6196,7 +6196,7 @@
                             <a:srgbClr val="FFFFFF"/>
                           </a:solidFill>
                         </a:rPr>
-                        <a:t>Ordering cost</a:t>
+                        <a:t>Ordering fees</a:t>
                       </a:r>
                     </a:p>
                   </a:txBody>
@@ -6238,7 +6238,7 @@
                             <a:srgbClr val="202020"/>
                           </a:solidFill>
                         </a:rPr>
-                        <a:t>83,624</a:t>
+                        <a:t>₹87.8 lakh</a:t>
                       </a:r>
                     </a:p>
                   </a:txBody>
@@ -6256,7 +6256,7 @@
                             <a:srgbClr val="202020"/>
                           </a:solidFill>
                         </a:rPr>
-                        <a:t>4,389</a:t>
+                        <a:t>₹4.6 lakh</a:t>
                       </a:r>
                     </a:p>
                   </a:txBody>
@@ -6292,7 +6292,7 @@
                             <a:srgbClr val="202020"/>
                           </a:solidFill>
                         </a:rPr>
-                        <a:t>5,821</a:t>
+                        <a:t>₹6.1 lakh</a:t>
                       </a:r>
                     </a:p>
                   </a:txBody>
@@ -6310,7 +6310,7 @@
                             <a:srgbClr val="202020"/>
                           </a:solidFill>
                         </a:rPr>
-                        <a:t>2,729</a:t>
+                        <a:t>₹2.9 lakh</a:t>
                       </a:r>
                     </a:p>
                   </a:txBody>
@@ -6352,7 +6352,7 @@
                             <a:srgbClr val="202020"/>
                           </a:solidFill>
                         </a:rPr>
-                        <a:t>82,049</a:t>
+                        <a:t>₹86.2 lakh</a:t>
                       </a:r>
                     </a:p>
                   </a:txBody>
@@ -6374,7 +6374,7 @@
                             <a:srgbClr val="202020"/>
                           </a:solidFill>
                         </a:rPr>
-                        <a:t>4,222</a:t>
+                        <a:t>₹4.4 lakh</a:t>
                       </a:r>
                     </a:p>
                   </a:txBody>
@@ -6418,7 +6418,7 @@
                             <a:srgbClr val="202020"/>
                           </a:solidFill>
                         </a:rPr>
-                        <a:t>7,057</a:t>
+                        <a:t>₹7.4 lakh</a:t>
                       </a:r>
                     </a:p>
                   </a:txBody>
@@ -6440,7 +6440,7 @@
                             <a:srgbClr val="202020"/>
                           </a:solidFill>
                         </a:rPr>
-                        <a:t>3,275</a:t>
+                        <a:t>₹3.4 lakh</a:t>
                       </a:r>
                     </a:p>
                   </a:txBody>
@@ -6482,7 +6482,7 @@
                             <a:srgbClr val="202020"/>
                           </a:solidFill>
                         </a:rPr>
-                        <a:t>72,302</a:t>
+                        <a:t>₹75.9 lakh</a:t>
                       </a:r>
                     </a:p>
                   </a:txBody>
@@ -6500,7 +6500,7 @@
                             <a:srgbClr val="202020"/>
                           </a:solidFill>
                         </a:rPr>
-                        <a:t>7,028</a:t>
+                        <a:t>₹7.4 lakh</a:t>
                       </a:r>
                     </a:p>
                   </a:txBody>
@@ -6536,7 +6536,7 @@
                             <a:srgbClr val="202020"/>
                           </a:solidFill>
                         </a:rPr>
-                        <a:t>9,988</a:t>
+                        <a:t>₹10.5 lakh</a:t>
                       </a:r>
                     </a:p>
                   </a:txBody>
@@ -6554,7 +6554,7 @@
                             <a:srgbClr val="202020"/>
                           </a:solidFill>
                         </a:rPr>
-                        <a:t>2,626</a:t>
+                        <a:t>₹2.8 lakh</a:t>
                       </a:r>
                     </a:p>
                   </a:txBody>
@@ -6596,7 +6596,7 @@
                             <a:srgbClr val="202020"/>
                           </a:solidFill>
                         </a:rPr>
-                        <a:t>70,365</a:t>
+                        <a:t>₹73.9 lakh</a:t>
                       </a:r>
                     </a:p>
                   </a:txBody>
@@ -6618,7 +6618,7 @@
                             <a:srgbClr val="202020"/>
                           </a:solidFill>
                         </a:rPr>
-                        <a:t>6,782</a:t>
+                        <a:t>₹7.1 lakh</a:t>
                       </a:r>
                     </a:p>
                   </a:txBody>
@@ -6662,7 +6662,7 @@
                             <a:srgbClr val="202020"/>
                           </a:solidFill>
                         </a:rPr>
-                        <a:t>15,677</a:t>
+                        <a:t>₹16.5 lakh</a:t>
                       </a:r>
                     </a:p>
                   </a:txBody>
@@ -6684,7 +6684,7 @@
                             <a:srgbClr val="202020"/>
                           </a:solidFill>
                         </a:rPr>
-                        <a:t>2,905</a:t>
+                        <a:t>₹3.1 lakh</a:t>
                       </a:r>
                     </a:p>
                   </a:txBody>
@@ -6726,7 +6726,7 @@
                             <a:srgbClr val="202020"/>
                           </a:solidFill>
                         </a:rPr>
-                        <a:t>50,751</a:t>
+                        <a:t>₹53.3 lakh</a:t>
                       </a:r>
                     </a:p>
                   </a:txBody>
@@ -6744,7 +6744,7 @@
                             <a:srgbClr val="202020"/>
                           </a:solidFill>
                         </a:rPr>
-                        <a:t>12,723</a:t>
+                        <a:t>₹13.4 lakh</a:t>
                       </a:r>
                     </a:p>
                   </a:txBody>
@@ -6780,7 +6780,7 @@
                             <a:srgbClr val="202020"/>
                           </a:solidFill>
                         </a:rPr>
-                        <a:t>27,644</a:t>
+                        <a:t>₹29.0 lakh</a:t>
                       </a:r>
                     </a:p>
                   </a:txBody>
@@ -6798,7 +6798,7 @@
                             <a:srgbClr val="202020"/>
                           </a:solidFill>
                         </a:rPr>
-                        <a:t>3,334</a:t>
+                        <a:t>₹3.5 lakh</a:t>
                       </a:r>
                     </a:p>
                   </a:txBody>
@@ -6840,7 +6840,7 @@
                             <a:srgbClr val="202020"/>
                           </a:solidFill>
                         </a:rPr>
-                        <a:t>-34,144</a:t>
+                        <a:t>-₹35.9 lakh</a:t>
                       </a:r>
                     </a:p>
                   </a:txBody>
@@ -6862,7 +6862,7 @@
                             <a:srgbClr val="202020"/>
                           </a:solidFill>
                         </a:rPr>
-                        <a:t>12,971</a:t>
+                        <a:t>₹13.6 lakh</a:t>
                       </a:r>
                     </a:p>
                   </a:txBody>
@@ -6906,7 +6906,7 @@
                             <a:srgbClr val="202020"/>
                           </a:solidFill>
                         </a:rPr>
-                        <a:t>19,900</a:t>
+                        <a:t>₹20.9 lakh</a:t>
                       </a:r>
                     </a:p>
                   </a:txBody>
@@ -6928,7 +6928,7 @@
                             <a:srgbClr val="202020"/>
                           </a:solidFill>
                         </a:rPr>
-                        <a:t>14,869</a:t>
+                        <a:t>₹15.6 lakh</a:t>
                       </a:r>
                     </a:p>
                   </a:txBody>
@@ -6979,7 +6979,7 @@
                   <a:srgbClr val="0D5A28"/>
                 </a:solidFill>
               </a:rPr>
-              <a:t>Tuning mattered: widening the search grid lifted the best policy from 66,395 to 84,920 during tuning. Beating an untuned baseline would have proved nothing.</a:t>
+              <a:t>Tuning mattered: widening the search lifted the best method from ₹69.7 lakh to ₹89.2 lakh. Beating an untuned method would have proved nothing.</a:t>
             </a:r>
           </a:p>
         </p:txBody>
@@ -7418,7 +7418,7 @@
                             <a:srgbClr val="FFFFFF"/>
                           </a:solidFill>
                         </a:rPr>
-                        <a:t>Policy</a:t>
+                        <a:t>Method</a:t>
                       </a:r>
                     </a:p>
                   </a:txBody>
@@ -7484,7 +7484,7 @@
                             <a:srgbClr val="FFFFFF"/>
                           </a:solidFill>
                         </a:rPr>
-                        <a:t>Ordering cost</a:t>
+                        <a:t>Ordering fees</a:t>
                       </a:r>
                     </a:p>
                   </a:txBody>
@@ -7526,7 +7526,7 @@
                             <a:srgbClr val="202020"/>
                           </a:solidFill>
                         </a:rPr>
-                        <a:t>83,624</a:t>
+                        <a:t>₹87.8 lakh</a:t>
                       </a:r>
                     </a:p>
                   </a:txBody>
@@ -7562,7 +7562,7 @@
                             <a:srgbClr val="202020"/>
                           </a:solidFill>
                         </a:rPr>
-                        <a:t>2,729</a:t>
+                        <a:t>₹2.9 lakh</a:t>
                       </a:r>
                     </a:p>
                   </a:txBody>
@@ -7582,7 +7582,7 @@
                             <a:srgbClr val="202020"/>
                           </a:solidFill>
                         </a:rPr>
-                        <a:t>MaskablePPO agent, tuned, 2M steps</a:t>
+                        <a:t>AI agent, tuned, 2M steps</a:t>
                       </a:r>
                     </a:p>
                   </a:txBody>
@@ -7604,7 +7604,7 @@
                             <a:srgbClr val="202020"/>
                           </a:solidFill>
                         </a:rPr>
-                        <a:t>75,926</a:t>
+                        <a:t>₹79.7 lakh</a:t>
                       </a:r>
                     </a:p>
                   </a:txBody>
@@ -7648,7 +7648,7 @@
                             <a:srgbClr val="202020"/>
                           </a:solidFill>
                         </a:rPr>
-                        <a:t>5,522</a:t>
+                        <a:t>₹5.8 lakh</a:t>
                       </a:r>
                     </a:p>
                   </a:txBody>
@@ -7672,7 +7672,7 @@
                             <a:srgbClr val="202020"/>
                           </a:solidFill>
                         </a:rPr>
-                        <a:t>MaskablePPO agent, untuned, 1M steps</a:t>
+                        <a:t>AI agent, untuned, 1M steps</a:t>
                       </a:r>
                     </a:p>
                   </a:txBody>
@@ -7690,7 +7690,7 @@
                             <a:srgbClr val="202020"/>
                           </a:solidFill>
                         </a:rPr>
-                        <a:t>71,227</a:t>
+                        <a:t>₹74.8 lakh</a:t>
                       </a:r>
                     </a:p>
                   </a:txBody>
@@ -7726,7 +7726,7 @@
                             <a:srgbClr val="202020"/>
                           </a:solidFill>
                         </a:rPr>
-                        <a:t>7,068</a:t>
+                        <a:t>₹7.4 lakh</a:t>
                       </a:r>
                     </a:p>
                   </a:txBody>
@@ -7746,7 +7746,7 @@
                             <a:srgbClr val="202020"/>
                           </a:solidFill>
                         </a:rPr>
-                        <a:t>PPO without action masking, 1M steps</a:t>
+                        <a:t>AI agent, no action masking, 1M steps</a:t>
                       </a:r>
                     </a:p>
                   </a:txBody>
@@ -7768,7 +7768,7 @@
                             <a:srgbClr val="202020"/>
                           </a:solidFill>
                         </a:rPr>
-                        <a:t>22,566</a:t>
+                        <a:t>₹23.7 lakh</a:t>
                       </a:r>
                     </a:p>
                   </a:txBody>
@@ -7812,7 +7812,7 @@
                             <a:srgbClr val="202020"/>
                           </a:solidFill>
                         </a:rPr>
-                        <a:t>13,988</a:t>
+                        <a:t>₹14.7 lakh</a:t>
                       </a:r>
                     </a:p>
                   </a:txBody>
@@ -7863,7 +7863,7 @@
                   <a:srgbClr val="0D5A28"/>
                 </a:solidFill>
               </a:rPr>
-              <a:t>The classical policy still wins by 7,698 per episode (paired t = -6.45, n = 30, significant). The agent reaches 90.8% of its profit and beats two of the four classical policies.</a:t>
+              <a:t>The classical method still wins, by ₹8.1 lakh per run (paired t = -6.45, n = 30, significant). The AI reaches 90.8% of its profit and beats two of the four classical methods.</a:t>
             </a:r>
           </a:p>
           <a:p>
@@ -7882,7 +7882,7 @@
                   <a:srgbClr val="202020"/>
                 </a:solidFill>
               </a:rPr>
-              <a:t>Where the gap comes from: stockouts (95.1% fill against 97.9%) and fragmented sourcing (the agent pays twice the baseline's ordering fees, 5,522 against 2,729).</a:t>
+              <a:t>Where the gap comes from: the AI runs out of stock more often (95.1% fill against 97.9%) and spreads orders across suppliers, paying twice the ordering fees (₹5.8 lakh against ₹2.9 lakh).</a:t>
             </a:r>
           </a:p>
           <a:p>
@@ -7901,7 +7901,7 @@
                   <a:srgbClr val="202020"/>
                 </a:solidFill>
               </a:rPr>
-              <a:t>Action masking is the largest single lever (about 3x). Tuning then closed 38% of the remaining gap, from 12,397 to 7,698.</a:t>
+              <a:t>Action masking was the biggest single improvement (about 3x). Tuning then closed 38% of the remaining gap, from ₹13.0 lakh to ₹8.1 lakh.</a:t>
             </a:r>
           </a:p>
           <a:p>
@@ -7920,7 +7920,7 @@
                   <a:srgbClr val="202020"/>
                 </a:solidFill>
               </a:rPr>
-              <a:t>The sweep chose the lowest learning rate offered and the larger network: the earlier runs oscillated because they learned too fast, not because they lacked capacity.</a:t>
+              <a:t>The search picked the lowest learning rate on offer and the larger network: the earlier runs were unstable because they learned too fast, not because the network was too small.</a:t>
             </a:r>
           </a:p>
         </p:txBody>
@@ -8318,7 +8318,7 @@
             </a:pPr>
             <a:r>
               <a:rPr lang="en-IN" sz="1600" b="1" dirty="0"/>
-              <a:t>Honest current finding: the tuned classical policy still beats the RL agent by 7,698 per episode, and the difference is statistically significant.</a:t>
+              <a:t>Honest current finding: the tuned classical policy still beats the RL agent by ₹8.1 lakh per run, and the difference is statistically significant.</a:t>
             </a:r>
           </a:p>
           <a:p>
@@ -12548,7 +12548,7 @@
         <p:spPr>
           <a:xfrm>
             <a:off x="838198" y="2050000"/>
-            <a:ext cx="5100000" cy="2583743"/>
+            <a:ext cx="5100000" cy="2588636"/>
           </a:xfrm>
           <a:prstGeom prst="rect">
             <a:avLst/>
@@ -14249,7 +14249,7 @@
                 </a:solidFill>
                 <a:latin typeface="Calibri"/>
               </a:rPr>
-              <a:t>order fee:  20</a:t>
+              <a:t>order fee:  ₹2,100</a:t>
             </a:r>
           </a:p>
           <a:p>
@@ -14449,7 +14449,7 @@
                 </a:solidFill>
                 <a:latin typeface="Calibri"/>
               </a:rPr>
-              <a:t>order fee:  45</a:t>
+              <a:t>order fee:  ₹4,725</a:t>
             </a:r>
           </a:p>
           <a:p>
@@ -14649,7 +14649,7 @@
                 </a:solidFill>
                 <a:latin typeface="Calibri"/>
               </a:rPr>
-              <a:t>order fee:  30</a:t>
+              <a:t>order fee:  ₹3,150</a:t>
             </a:r>
           </a:p>
           <a:p>

--- a/reports/SupplyAI-RL_Mid_Project_Review.pptx
+++ b/reports/SupplyAI-RL_Mid_Project_Review.pptx
@@ -9011,7 +9011,7 @@
                             <a:srgbClr val="202020"/>
                           </a:solidFill>
                         </a:rPr>
-                        <a:t>Plain-English reason for every order decision</a:t>
+                        <a:t>Plain-English explanation of every order decision</a:t>
                       </a:r>
                     </a:p>
                   </a:txBody>
@@ -13614,7 +13614,7 @@
             </a:pPr>
             <a:r>
               <a:rPr lang="en-IN" sz="1800" b="1" dirty="0"/>
-              <a:t>Reinforcement learning can express what a formula cannot: a joint ordering and sourcing policy that adapts to season, volatility and supplier state.</a:t>
+              <a:t>Our hypothesis: RL can learn a joint ordering and sourcing policy that adapts to season, volatility and supplier state, which a formula cannot.</a:t>
             </a:r>
           </a:p>
           <a:p>
@@ -13642,7 +13642,7 @@
             </a:pPr>
             <a:r>
               <a:rPr lang="en-IN" sz="1500" b="0" dirty="0"/>
-              <a:t>Hence the motivation: pair an RL decision-maker with an LLM that states the reason for every order in business language.</a:t>
+              <a:t>Hence the motivation: pair an RL decision-maker with an LLM that explains the situation behind every order in business language, every number checked.</a:t>
             </a:r>
           </a:p>
         </p:txBody>
